--- a/Slides/Topic 1 What is ML.pptx
+++ b/Slides/Topic 1 What is ML.pptx
@@ -143,54 +143,23 @@
 </p:presentation>
 </file>
 
-<file path=ppt/revisionInfo.xml><?xml version="1.0" encoding="utf-8"?>
-<p1510:revInfo xmlns:a="http://schemas.openxmlformats.org/drawingml/2006/main" xmlns:r="http://schemas.openxmlformats.org/officeDocument/2006/relationships" xmlns:p1510="http://schemas.microsoft.com/office/powerpoint/2015/10/main">
-  <p1510:revLst>
-    <p1510:client id="{0F41E1BC-6E98-44EC-BBF0-FFD512BC8FCF}" v="51" dt="2025-10-21T10:31:47.603"/>
-  </p1510:revLst>
-</p1510:revInfo>
-</file>
-
 <file path=ppt/changesInfos/changesInfo1.xml><?xml version="1.0" encoding="utf-8"?>
 <pc:chgInfo xmlns:a="http://schemas.openxmlformats.org/drawingml/2006/main" xmlns:r="http://schemas.openxmlformats.org/officeDocument/2006/relationships" xmlns:ac="http://schemas.microsoft.com/office/drawing/2013/main/command" xmlns:pc="http://schemas.microsoft.com/office/powerpoint/2013/main/command">
   <pc:docChgLst>
-    <pc:chgData name="Javier Bas Vicente" userId="96bf8a96-3310-496c-8c7e-8a087f977faa" providerId="ADAL" clId="{E8FBC8B5-4C40-46BF-9D71-F1AE583FC5BE}"/>
-    <pc:docChg chg="undo custSel modSld">
-      <pc:chgData name="Javier Bas Vicente" userId="96bf8a96-3310-496c-8c7e-8a087f977faa" providerId="ADAL" clId="{E8FBC8B5-4C40-46BF-9D71-F1AE583FC5BE}" dt="2024-10-28T12:03:16.273" v="62" actId="20577"/>
+    <pc:chgData name="Javier Bas Vicente" userId="96bf8a96-3310-496c-8c7e-8a087f977faa" providerId="ADAL" clId="{2B536B82-AB7D-4663-BD33-35DAC5C58A24}"/>
+    <pc:docChg chg="custSel modSld">
+      <pc:chgData name="Javier Bas Vicente" userId="96bf8a96-3310-496c-8c7e-8a087f977faa" providerId="ADAL" clId="{2B536B82-AB7D-4663-BD33-35DAC5C58A24}" dt="2026-10-19T10:28:54.293" v="12" actId="6549"/>
       <pc:docMkLst>
         <pc:docMk/>
       </pc:docMkLst>
       <pc:sldChg chg="modSp mod">
-        <pc:chgData name="Javier Bas Vicente" userId="96bf8a96-3310-496c-8c7e-8a087f977faa" providerId="ADAL" clId="{E8FBC8B5-4C40-46BF-9D71-F1AE583FC5BE}" dt="2024-10-28T12:03:16.273" v="62" actId="20577"/>
-        <pc:sldMkLst>
-          <pc:docMk/>
-          <pc:sldMk cId="2616250411" sldId="275"/>
-        </pc:sldMkLst>
-      </pc:sldChg>
-      <pc:sldChg chg="modSp mod">
-        <pc:chgData name="Javier Bas Vicente" userId="96bf8a96-3310-496c-8c7e-8a087f977faa" providerId="ADAL" clId="{E8FBC8B5-4C40-46BF-9D71-F1AE583FC5BE}" dt="2024-10-19T16:57:22.744" v="1" actId="20577"/>
-        <pc:sldMkLst>
-          <pc:docMk/>
-          <pc:sldMk cId="2149080833" sldId="278"/>
-        </pc:sldMkLst>
-      </pc:sldChg>
-    </pc:docChg>
-  </pc:docChgLst>
-  <pc:docChgLst>
-    <pc:chgData name="Javier Bas Vicente" userId="96bf8a96-3310-496c-8c7e-8a087f977faa" providerId="ADAL" clId="{01F37B28-FECE-485C-BA1B-E2D29CFD8DE6}"/>
-    <pc:docChg chg="undo redo custSel addSld delSld modSld">
-      <pc:chgData name="Javier Bas Vicente" userId="96bf8a96-3310-496c-8c7e-8a087f977faa" providerId="ADAL" clId="{01F37B28-FECE-485C-BA1B-E2D29CFD8DE6}" dt="2025-10-21T10:33:59.087" v="581" actId="20577"/>
-      <pc:docMkLst>
-        <pc:docMk/>
-      </pc:docMkLst>
-      <pc:sldChg chg="modSp mod">
-        <pc:chgData name="Javier Bas Vicente" userId="96bf8a96-3310-496c-8c7e-8a087f977faa" providerId="ADAL" clId="{01F37B28-FECE-485C-BA1B-E2D29CFD8DE6}" dt="2025-10-21T10:13:15.013" v="456" actId="2711"/>
+        <pc:chgData name="Javier Bas Vicente" userId="96bf8a96-3310-496c-8c7e-8a087f977faa" providerId="ADAL" clId="{2B536B82-AB7D-4663-BD33-35DAC5C58A24}" dt="2026-10-19T10:28:19.752" v="11" actId="6549"/>
         <pc:sldMkLst>
           <pc:docMk/>
           <pc:sldMk cId="4236828119" sldId="267"/>
         </pc:sldMkLst>
         <pc:spChg chg="mod">
-          <ac:chgData name="Javier Bas Vicente" userId="96bf8a96-3310-496c-8c7e-8a087f977faa" providerId="ADAL" clId="{01F37B28-FECE-485C-BA1B-E2D29CFD8DE6}" dt="2025-10-21T10:13:15.013" v="456" actId="2711"/>
+          <ac:chgData name="Javier Bas Vicente" userId="96bf8a96-3310-496c-8c7e-8a087f977faa" providerId="ADAL" clId="{2B536B82-AB7D-4663-BD33-35DAC5C58A24}" dt="2026-10-19T10:28:19.752" v="11" actId="6549"/>
           <ac:spMkLst>
             <pc:docMk/>
             <pc:sldMk cId="4236828119" sldId="267"/>
@@ -198,334 +167,50 @@
           </ac:spMkLst>
         </pc:spChg>
       </pc:sldChg>
-      <pc:sldChg chg="addSp delSp modSp mod">
-        <pc:chgData name="Javier Bas Vicente" userId="96bf8a96-3310-496c-8c7e-8a087f977faa" providerId="ADAL" clId="{01F37B28-FECE-485C-BA1B-E2D29CFD8DE6}" dt="2025-10-21T09:49:42.641" v="264" actId="115"/>
+      <pc:sldChg chg="modSp mod">
+        <pc:chgData name="Javier Bas Vicente" userId="96bf8a96-3310-496c-8c7e-8a087f977faa" providerId="ADAL" clId="{2B536B82-AB7D-4663-BD33-35DAC5C58A24}" dt="2026-10-19T10:23:50.426" v="2" actId="27636"/>
         <pc:sldMkLst>
           <pc:docMk/>
           <pc:sldMk cId="2924134329" sldId="270"/>
         </pc:sldMkLst>
         <pc:spChg chg="mod">
-          <ac:chgData name="Javier Bas Vicente" userId="96bf8a96-3310-496c-8c7e-8a087f977faa" providerId="ADAL" clId="{01F37B28-FECE-485C-BA1B-E2D29CFD8DE6}" dt="2025-10-21T09:49:42.641" v="264" actId="115"/>
+          <ac:chgData name="Javier Bas Vicente" userId="96bf8a96-3310-496c-8c7e-8a087f977faa" providerId="ADAL" clId="{2B536B82-AB7D-4663-BD33-35DAC5C58A24}" dt="2026-10-19T10:23:50.426" v="2" actId="27636"/>
           <ac:spMkLst>
             <pc:docMk/>
             <pc:sldMk cId="2924134329" sldId="270"/>
             <ac:spMk id="3" creationId="{7035E4AA-6F11-BAE1-CC1D-242A88A33FB9}"/>
           </ac:spMkLst>
         </pc:spChg>
-        <pc:spChg chg="del">
-          <ac:chgData name="Javier Bas Vicente" userId="96bf8a96-3310-496c-8c7e-8a087f977faa" providerId="ADAL" clId="{01F37B28-FECE-485C-BA1B-E2D29CFD8DE6}" dt="2025-10-21T09:48:34.423" v="221" actId="21"/>
+      </pc:sldChg>
+      <pc:sldChg chg="modSp mod">
+        <pc:chgData name="Javier Bas Vicente" userId="96bf8a96-3310-496c-8c7e-8a087f977faa" providerId="ADAL" clId="{2B536B82-AB7D-4663-BD33-35DAC5C58A24}" dt="2026-10-19T10:25:46.556" v="6" actId="20577"/>
+        <pc:sldMkLst>
+          <pc:docMk/>
+          <pc:sldMk cId="3363976930" sldId="272"/>
+        </pc:sldMkLst>
+        <pc:spChg chg="mod">
+          <ac:chgData name="Javier Bas Vicente" userId="96bf8a96-3310-496c-8c7e-8a087f977faa" providerId="ADAL" clId="{2B536B82-AB7D-4663-BD33-35DAC5C58A24}" dt="2026-10-19T10:25:46.556" v="6" actId="20577"/>
           <ac:spMkLst>
             <pc:docMk/>
-            <pc:sldMk cId="2924134329" sldId="270"/>
-            <ac:spMk id="6" creationId="{F32F8EC8-25C4-3FB6-7489-E3CBB7EB387B}"/>
-          </ac:spMkLst>
-        </pc:spChg>
-        <pc:spChg chg="del">
-          <ac:chgData name="Javier Bas Vicente" userId="96bf8a96-3310-496c-8c7e-8a087f977faa" providerId="ADAL" clId="{01F37B28-FECE-485C-BA1B-E2D29CFD8DE6}" dt="2025-10-21T09:48:34.423" v="221" actId="21"/>
-          <ac:spMkLst>
-            <pc:docMk/>
-            <pc:sldMk cId="2924134329" sldId="270"/>
-            <ac:spMk id="9" creationId="{39C1E5C8-F096-886F-8668-60C815859EA9}"/>
-          </ac:spMkLst>
-        </pc:spChg>
-        <pc:picChg chg="add del">
-          <ac:chgData name="Javier Bas Vicente" userId="96bf8a96-3310-496c-8c7e-8a087f977faa" providerId="ADAL" clId="{01F37B28-FECE-485C-BA1B-E2D29CFD8DE6}" dt="2025-10-21T09:45:53.268" v="87" actId="478"/>
-          <ac:picMkLst>
-            <pc:docMk/>
-            <pc:sldMk cId="2924134329" sldId="270"/>
-            <ac:picMk id="11" creationId="{8890E8D0-5773-F99C-1AC2-F84980A00AD4}"/>
-          </ac:picMkLst>
-        </pc:picChg>
-        <pc:picChg chg="add del">
-          <ac:chgData name="Javier Bas Vicente" userId="96bf8a96-3310-496c-8c7e-8a087f977faa" providerId="ADAL" clId="{01F37B28-FECE-485C-BA1B-E2D29CFD8DE6}" dt="2025-10-21T09:45:53.268" v="87" actId="478"/>
-          <ac:picMkLst>
-            <pc:docMk/>
-            <pc:sldMk cId="2924134329" sldId="270"/>
-            <ac:picMk id="12" creationId="{CCE56775-F6CE-3DD7-FE2D-2418769A2E21}"/>
-          </ac:picMkLst>
-        </pc:picChg>
-      </pc:sldChg>
-      <pc:sldChg chg="modSp mod">
-        <pc:chgData name="Javier Bas Vicente" userId="96bf8a96-3310-496c-8c7e-8a087f977faa" providerId="ADAL" clId="{01F37B28-FECE-485C-BA1B-E2D29CFD8DE6}" dt="2025-10-21T10:13:38.723" v="462" actId="20577"/>
-        <pc:sldMkLst>
-          <pc:docMk/>
-          <pc:sldMk cId="397702210" sldId="271"/>
-        </pc:sldMkLst>
-        <pc:spChg chg="mod">
-          <ac:chgData name="Javier Bas Vicente" userId="96bf8a96-3310-496c-8c7e-8a087f977faa" providerId="ADAL" clId="{01F37B28-FECE-485C-BA1B-E2D29CFD8DE6}" dt="2025-10-21T10:13:38.723" v="462" actId="20577"/>
-          <ac:spMkLst>
-            <pc:docMk/>
-            <pc:sldMk cId="397702210" sldId="271"/>
-            <ac:spMk id="3" creationId="{7035E4AA-6F11-BAE1-CC1D-242A88A33FB9}"/>
+            <pc:sldMk cId="3363976930" sldId="272"/>
+            <ac:spMk id="11" creationId="{9DC8F8AF-3059-79CC-CD66-FE68DE599343}"/>
           </ac:spMkLst>
         </pc:spChg>
       </pc:sldChg>
       <pc:sldChg chg="modSp mod">
-        <pc:chgData name="Javier Bas Vicente" userId="96bf8a96-3310-496c-8c7e-8a087f977faa" providerId="ADAL" clId="{01F37B28-FECE-485C-BA1B-E2D29CFD8DE6}" dt="2025-10-21T10:27:48.189" v="480" actId="20577"/>
+        <pc:chgData name="Javier Bas Vicente" userId="96bf8a96-3310-496c-8c7e-8a087f977faa" providerId="ADAL" clId="{2B536B82-AB7D-4663-BD33-35DAC5C58A24}" dt="2026-10-19T10:28:54.293" v="12" actId="6549"/>
         <pc:sldMkLst>
           <pc:docMk/>
           <pc:sldMk cId="363219939" sldId="273"/>
         </pc:sldMkLst>
         <pc:spChg chg="mod">
-          <ac:chgData name="Javier Bas Vicente" userId="96bf8a96-3310-496c-8c7e-8a087f977faa" providerId="ADAL" clId="{01F37B28-FECE-485C-BA1B-E2D29CFD8DE6}" dt="2025-10-21T10:27:48.189" v="480" actId="20577"/>
+          <ac:chgData name="Javier Bas Vicente" userId="96bf8a96-3310-496c-8c7e-8a087f977faa" providerId="ADAL" clId="{2B536B82-AB7D-4663-BD33-35DAC5C58A24}" dt="2026-10-19T10:28:54.293" v="12" actId="6549"/>
           <ac:spMkLst>
             <pc:docMk/>
             <pc:sldMk cId="363219939" sldId="273"/>
             <ac:spMk id="3" creationId="{7035E4AA-6F11-BAE1-CC1D-242A88A33FB9}"/>
           </ac:spMkLst>
         </pc:spChg>
-      </pc:sldChg>
-      <pc:sldChg chg="modSp mod">
-        <pc:chgData name="Javier Bas Vicente" userId="96bf8a96-3310-496c-8c7e-8a087f977faa" providerId="ADAL" clId="{01F37B28-FECE-485C-BA1B-E2D29CFD8DE6}" dt="2025-10-21T10:29:34.693" v="509" actId="113"/>
-        <pc:sldMkLst>
-          <pc:docMk/>
-          <pc:sldMk cId="2616250411" sldId="275"/>
-        </pc:sldMkLst>
-        <pc:spChg chg="mod">
-          <ac:chgData name="Javier Bas Vicente" userId="96bf8a96-3310-496c-8c7e-8a087f977faa" providerId="ADAL" clId="{01F37B28-FECE-485C-BA1B-E2D29CFD8DE6}" dt="2025-10-21T10:29:34.693" v="509" actId="113"/>
-          <ac:spMkLst>
-            <pc:docMk/>
-            <pc:sldMk cId="2616250411" sldId="275"/>
-            <ac:spMk id="3" creationId="{7035E4AA-6F11-BAE1-CC1D-242A88A33FB9}"/>
-          </ac:spMkLst>
-        </pc:spChg>
-      </pc:sldChg>
-      <pc:sldChg chg="modSp modAnim">
-        <pc:chgData name="Javier Bas Vicente" userId="96bf8a96-3310-496c-8c7e-8a087f977faa" providerId="ADAL" clId="{01F37B28-FECE-485C-BA1B-E2D29CFD8DE6}" dt="2025-10-21T10:31:47.603" v="547" actId="20577"/>
-        <pc:sldMkLst>
-          <pc:docMk/>
-          <pc:sldMk cId="2067030574" sldId="276"/>
-        </pc:sldMkLst>
-        <pc:spChg chg="mod">
-          <ac:chgData name="Javier Bas Vicente" userId="96bf8a96-3310-496c-8c7e-8a087f977faa" providerId="ADAL" clId="{01F37B28-FECE-485C-BA1B-E2D29CFD8DE6}" dt="2025-10-21T10:31:47.603" v="547" actId="20577"/>
-          <ac:spMkLst>
-            <pc:docMk/>
-            <pc:sldMk cId="2067030574" sldId="276"/>
-            <ac:spMk id="3" creationId="{7035E4AA-6F11-BAE1-CC1D-242A88A33FB9}"/>
-          </ac:spMkLst>
-        </pc:spChg>
-      </pc:sldChg>
-      <pc:sldChg chg="modSp mod">
-        <pc:chgData name="Javier Bas Vicente" userId="96bf8a96-3310-496c-8c7e-8a087f977faa" providerId="ADAL" clId="{01F37B28-FECE-485C-BA1B-E2D29CFD8DE6}" dt="2025-10-21T10:33:59.087" v="581" actId="20577"/>
-        <pc:sldMkLst>
-          <pc:docMk/>
-          <pc:sldMk cId="1559458376" sldId="277"/>
-        </pc:sldMkLst>
-        <pc:spChg chg="mod">
-          <ac:chgData name="Javier Bas Vicente" userId="96bf8a96-3310-496c-8c7e-8a087f977faa" providerId="ADAL" clId="{01F37B28-FECE-485C-BA1B-E2D29CFD8DE6}" dt="2025-10-21T10:33:59.087" v="581" actId="20577"/>
-          <ac:spMkLst>
-            <pc:docMk/>
-            <pc:sldMk cId="1559458376" sldId="277"/>
-            <ac:spMk id="3" creationId="{7035E4AA-6F11-BAE1-CC1D-242A88A33FB9}"/>
-          </ac:spMkLst>
-        </pc:spChg>
-      </pc:sldChg>
-      <pc:sldChg chg="modSp mod">
-        <pc:chgData name="Javier Bas Vicente" userId="96bf8a96-3310-496c-8c7e-8a087f977faa" providerId="ADAL" clId="{01F37B28-FECE-485C-BA1B-E2D29CFD8DE6}" dt="2025-10-21T09:42:41.805" v="2" actId="6549"/>
-        <pc:sldMkLst>
-          <pc:docMk/>
-          <pc:sldMk cId="941714419" sldId="282"/>
-        </pc:sldMkLst>
-        <pc:spChg chg="mod">
-          <ac:chgData name="Javier Bas Vicente" userId="96bf8a96-3310-496c-8c7e-8a087f977faa" providerId="ADAL" clId="{01F37B28-FECE-485C-BA1B-E2D29CFD8DE6}" dt="2025-10-21T09:42:41.805" v="2" actId="6549"/>
-          <ac:spMkLst>
-            <pc:docMk/>
-            <pc:sldMk cId="941714419" sldId="282"/>
-            <ac:spMk id="3" creationId="{180631EB-DE96-9FA0-145F-1211D8DA1F14}"/>
-          </ac:spMkLst>
-        </pc:spChg>
-      </pc:sldChg>
-      <pc:sldChg chg="addSp modSp new del">
-        <pc:chgData name="Javier Bas Vicente" userId="96bf8a96-3310-496c-8c7e-8a087f977faa" providerId="ADAL" clId="{01F37B28-FECE-485C-BA1B-E2D29CFD8DE6}" dt="2025-10-21T09:45:46.193" v="84" actId="680"/>
-        <pc:sldMkLst>
-          <pc:docMk/>
-          <pc:sldMk cId="2677739759" sldId="285"/>
-        </pc:sldMkLst>
-        <pc:picChg chg="add mod">
-          <ac:chgData name="Javier Bas Vicente" userId="96bf8a96-3310-496c-8c7e-8a087f977faa" providerId="ADAL" clId="{01F37B28-FECE-485C-BA1B-E2D29CFD8DE6}" dt="2025-10-21T09:45:42.209" v="83"/>
-          <ac:picMkLst>
-            <pc:docMk/>
-            <pc:sldMk cId="2677739759" sldId="285"/>
-            <ac:picMk id="11" creationId="{8890E8D0-5773-F99C-1AC2-F84980A00AD4}"/>
-          </ac:picMkLst>
-        </pc:picChg>
-        <pc:picChg chg="add mod">
-          <ac:chgData name="Javier Bas Vicente" userId="96bf8a96-3310-496c-8c7e-8a087f977faa" providerId="ADAL" clId="{01F37B28-FECE-485C-BA1B-E2D29CFD8DE6}" dt="2025-10-21T09:45:42.209" v="83"/>
-          <ac:picMkLst>
-            <pc:docMk/>
-            <pc:sldMk cId="2677739759" sldId="285"/>
-            <ac:picMk id="12" creationId="{CCE56775-F6CE-3DD7-FE2D-2418769A2E21}"/>
-          </ac:picMkLst>
-        </pc:picChg>
-      </pc:sldChg>
-      <pc:sldChg chg="addSp delSp modSp add mod">
-        <pc:chgData name="Javier Bas Vicente" userId="96bf8a96-3310-496c-8c7e-8a087f977faa" providerId="ADAL" clId="{01F37B28-FECE-485C-BA1B-E2D29CFD8DE6}" dt="2025-10-21T09:49:58.725" v="337" actId="1035"/>
-        <pc:sldMkLst>
-          <pc:docMk/>
-          <pc:sldMk cId="4231152004" sldId="285"/>
-        </pc:sldMkLst>
-        <pc:spChg chg="del">
-          <ac:chgData name="Javier Bas Vicente" userId="96bf8a96-3310-496c-8c7e-8a087f977faa" providerId="ADAL" clId="{01F37B28-FECE-485C-BA1B-E2D29CFD8DE6}" dt="2025-10-21T09:45:56.038" v="88" actId="478"/>
-          <ac:spMkLst>
-            <pc:docMk/>
-            <pc:sldMk cId="4231152004" sldId="285"/>
-            <ac:spMk id="3" creationId="{428FCE57-A9C4-35EE-075D-D8B772003F79}"/>
-          </ac:spMkLst>
-        </pc:spChg>
-        <pc:spChg chg="add del mod">
-          <ac:chgData name="Javier Bas Vicente" userId="96bf8a96-3310-496c-8c7e-8a087f977faa" providerId="ADAL" clId="{01F37B28-FECE-485C-BA1B-E2D29CFD8DE6}" dt="2025-10-21T09:45:59.907" v="89" actId="478"/>
-          <ac:spMkLst>
-            <pc:docMk/>
-            <pc:sldMk cId="4231152004" sldId="285"/>
-            <ac:spMk id="5" creationId="{E5E2D22F-1AA2-BB0A-CCAA-E5646920761B}"/>
-          </ac:spMkLst>
-        </pc:spChg>
-        <pc:spChg chg="mod">
-          <ac:chgData name="Javier Bas Vicente" userId="96bf8a96-3310-496c-8c7e-8a087f977faa" providerId="ADAL" clId="{01F37B28-FECE-485C-BA1B-E2D29CFD8DE6}" dt="2025-10-21T09:49:58.725" v="337" actId="1035"/>
-          <ac:spMkLst>
-            <pc:docMk/>
-            <pc:sldMk cId="4231152004" sldId="285"/>
-            <ac:spMk id="6" creationId="{01463823-C860-F1E6-EC8A-60182ABA5243}"/>
-          </ac:spMkLst>
-        </pc:spChg>
-        <pc:spChg chg="mod">
-          <ac:chgData name="Javier Bas Vicente" userId="96bf8a96-3310-496c-8c7e-8a087f977faa" providerId="ADAL" clId="{01F37B28-FECE-485C-BA1B-E2D29CFD8DE6}" dt="2025-10-21T09:49:58.725" v="337" actId="1035"/>
-          <ac:spMkLst>
-            <pc:docMk/>
-            <pc:sldMk cId="4231152004" sldId="285"/>
-            <ac:spMk id="9" creationId="{B5E083B5-5414-DAFE-33F5-EF138A018A48}"/>
-          </ac:spMkLst>
-        </pc:spChg>
-        <pc:picChg chg="mod">
-          <ac:chgData name="Javier Bas Vicente" userId="96bf8a96-3310-496c-8c7e-8a087f977faa" providerId="ADAL" clId="{01F37B28-FECE-485C-BA1B-E2D29CFD8DE6}" dt="2025-10-21T09:46:18.585" v="142" actId="14100"/>
-          <ac:picMkLst>
-            <pc:docMk/>
-            <pc:sldMk cId="4231152004" sldId="285"/>
-            <ac:picMk id="11" creationId="{C3D4D570-5CCD-B470-4EDD-EB6BE5ABDDD5}"/>
-          </ac:picMkLst>
-        </pc:picChg>
-        <pc:picChg chg="mod">
-          <ac:chgData name="Javier Bas Vicente" userId="96bf8a96-3310-496c-8c7e-8a087f977faa" providerId="ADAL" clId="{01F37B28-FECE-485C-BA1B-E2D29CFD8DE6}" dt="2025-10-21T09:46:18.585" v="142" actId="14100"/>
-          <ac:picMkLst>
-            <pc:docMk/>
-            <pc:sldMk cId="4231152004" sldId="285"/>
-            <ac:picMk id="12" creationId="{3E4C51D1-528F-BA29-2736-1313684852DE}"/>
-          </ac:picMkLst>
-        </pc:picChg>
-      </pc:sldChg>
-    </pc:docChg>
-  </pc:docChgLst>
-  <pc:docChgLst>
-    <pc:chgData name="Javier Bas Vicente" userId="96bf8a96-3310-496c-8c7e-8a087f977faa" providerId="ADAL" clId="{F8F14039-D26C-478B-A3B6-430B35B74BC5}"/>
-    <pc:docChg chg="undo custSel addSld delSld modSld">
-      <pc:chgData name="Javier Bas Vicente" userId="96bf8a96-3310-496c-8c7e-8a087f977faa" providerId="ADAL" clId="{F8F14039-D26C-478B-A3B6-430B35B74BC5}" dt="2023-10-20T16:42:21.664" v="745" actId="1076"/>
-      <pc:docMkLst>
-        <pc:docMk/>
-      </pc:docMkLst>
-      <pc:sldChg chg="modSp mod">
-        <pc:chgData name="Javier Bas Vicente" userId="96bf8a96-3310-496c-8c7e-8a087f977faa" providerId="ADAL" clId="{F8F14039-D26C-478B-A3B6-430B35B74BC5}" dt="2023-10-19T14:57:22.507" v="134" actId="20577"/>
-        <pc:sldMkLst>
-          <pc:docMk/>
-          <pc:sldMk cId="4236828119" sldId="267"/>
-        </pc:sldMkLst>
-      </pc:sldChg>
-      <pc:sldChg chg="modSp mod">
-        <pc:chgData name="Javier Bas Vicente" userId="96bf8a96-3310-496c-8c7e-8a087f977faa" providerId="ADAL" clId="{F8F14039-D26C-478B-A3B6-430B35B74BC5}" dt="2023-10-19T12:42:24.146" v="42" actId="27636"/>
-        <pc:sldMkLst>
-          <pc:docMk/>
-          <pc:sldMk cId="3465997888" sldId="268"/>
-        </pc:sldMkLst>
-      </pc:sldChg>
-      <pc:sldChg chg="modSp mod">
-        <pc:chgData name="Javier Bas Vicente" userId="96bf8a96-3310-496c-8c7e-8a087f977faa" providerId="ADAL" clId="{F8F14039-D26C-478B-A3B6-430B35B74BC5}" dt="2023-10-19T12:44:01.879" v="54" actId="115"/>
-        <pc:sldMkLst>
-          <pc:docMk/>
-          <pc:sldMk cId="2509727003" sldId="269"/>
-        </pc:sldMkLst>
-      </pc:sldChg>
-      <pc:sldChg chg="modSp mod">
-        <pc:chgData name="Javier Bas Vicente" userId="96bf8a96-3310-496c-8c7e-8a087f977faa" providerId="ADAL" clId="{F8F14039-D26C-478B-A3B6-430B35B74BC5}" dt="2023-10-19T14:58:31.311" v="188" actId="20577"/>
-        <pc:sldMkLst>
-          <pc:docMk/>
-          <pc:sldMk cId="397702210" sldId="271"/>
-        </pc:sldMkLst>
-      </pc:sldChg>
-      <pc:sldChg chg="modSp mod">
-        <pc:chgData name="Javier Bas Vicente" userId="96bf8a96-3310-496c-8c7e-8a087f977faa" providerId="ADAL" clId="{F8F14039-D26C-478B-A3B6-430B35B74BC5}" dt="2023-10-19T12:47:55.622" v="123" actId="20577"/>
-        <pc:sldMkLst>
-          <pc:docMk/>
-          <pc:sldMk cId="3363976930" sldId="272"/>
-        </pc:sldMkLst>
-      </pc:sldChg>
-      <pc:sldChg chg="modSp mod">
-        <pc:chgData name="Javier Bas Vicente" userId="96bf8a96-3310-496c-8c7e-8a087f977faa" providerId="ADAL" clId="{F8F14039-D26C-478B-A3B6-430B35B74BC5}" dt="2023-10-20T16:30:50.075" v="626" actId="313"/>
-        <pc:sldMkLst>
-          <pc:docMk/>
-          <pc:sldMk cId="363219939" sldId="273"/>
-        </pc:sldMkLst>
-      </pc:sldChg>
-      <pc:sldChg chg="addSp delSp modSp mod">
-        <pc:chgData name="Javier Bas Vicente" userId="96bf8a96-3310-496c-8c7e-8a087f977faa" providerId="ADAL" clId="{F8F14039-D26C-478B-A3B6-430B35B74BC5}" dt="2023-10-20T16:32:06.259" v="628" actId="22"/>
-        <pc:sldMkLst>
-          <pc:docMk/>
-          <pc:sldMk cId="2616250411" sldId="275"/>
-        </pc:sldMkLst>
-      </pc:sldChg>
-      <pc:sldChg chg="modSp mod">
-        <pc:chgData name="Javier Bas Vicente" userId="96bf8a96-3310-496c-8c7e-8a087f977faa" providerId="ADAL" clId="{F8F14039-D26C-478B-A3B6-430B35B74BC5}" dt="2023-10-19T15:09:26.575" v="620" actId="313"/>
-        <pc:sldMkLst>
-          <pc:docMk/>
-          <pc:sldMk cId="1559458376" sldId="277"/>
-        </pc:sldMkLst>
-      </pc:sldChg>
-      <pc:sldChg chg="modSp mod">
-        <pc:chgData name="Javier Bas Vicente" userId="96bf8a96-3310-496c-8c7e-8a087f977faa" providerId="ADAL" clId="{F8F14039-D26C-478B-A3B6-430B35B74BC5}" dt="2023-10-19T12:40:05.591" v="3" actId="20577"/>
-        <pc:sldMkLst>
-          <pc:docMk/>
-          <pc:sldMk cId="2149080833" sldId="278"/>
-        </pc:sldMkLst>
-      </pc:sldChg>
-      <pc:sldChg chg="modSp mod">
-        <pc:chgData name="Javier Bas Vicente" userId="96bf8a96-3310-496c-8c7e-8a087f977faa" providerId="ADAL" clId="{F8F14039-D26C-478B-A3B6-430B35B74BC5}" dt="2023-10-19T12:40:48.884" v="27" actId="20577"/>
-        <pc:sldMkLst>
-          <pc:docMk/>
-          <pc:sldMk cId="2034630669" sldId="280"/>
-        </pc:sldMkLst>
-      </pc:sldChg>
-      <pc:sldChg chg="modSp mod">
-        <pc:chgData name="Javier Bas Vicente" userId="96bf8a96-3310-496c-8c7e-8a087f977faa" providerId="ADAL" clId="{F8F14039-D26C-478B-A3B6-430B35B74BC5}" dt="2023-10-19T12:41:24.394" v="40" actId="27636"/>
-        <pc:sldMkLst>
-          <pc:docMk/>
-          <pc:sldMk cId="3514338654" sldId="281"/>
-        </pc:sldMkLst>
-      </pc:sldChg>
-      <pc:sldChg chg="modSp mod">
-        <pc:chgData name="Javier Bas Vicente" userId="96bf8a96-3310-496c-8c7e-8a087f977faa" providerId="ADAL" clId="{F8F14039-D26C-478B-A3B6-430B35B74BC5}" dt="2023-10-19T12:45:03.658" v="118" actId="20577"/>
-        <pc:sldMkLst>
-          <pc:docMk/>
-          <pc:sldMk cId="941714419" sldId="282"/>
-        </pc:sldMkLst>
-      </pc:sldChg>
-      <pc:sldChg chg="modSp add del mod">
-        <pc:chgData name="Javier Bas Vicente" userId="96bf8a96-3310-496c-8c7e-8a087f977faa" providerId="ADAL" clId="{F8F14039-D26C-478B-A3B6-430B35B74BC5}" dt="2023-10-19T15:07:43.785" v="600" actId="47"/>
-        <pc:sldMkLst>
-          <pc:docMk/>
-          <pc:sldMk cId="607542005" sldId="283"/>
-        </pc:sldMkLst>
-      </pc:sldChg>
-      <pc:sldChg chg="addSp modSp add mod">
-        <pc:chgData name="Javier Bas Vicente" userId="96bf8a96-3310-496c-8c7e-8a087f977faa" providerId="ADAL" clId="{F8F14039-D26C-478B-A3B6-430B35B74BC5}" dt="2023-10-20T16:42:21.664" v="745" actId="1076"/>
-        <pc:sldMkLst>
-          <pc:docMk/>
-          <pc:sldMk cId="2486130316" sldId="283"/>
-        </pc:sldMkLst>
-      </pc:sldChg>
-      <pc:sldChg chg="addSp delSp modSp add mod">
-        <pc:chgData name="Javier Bas Vicente" userId="96bf8a96-3310-496c-8c7e-8a087f977faa" providerId="ADAL" clId="{F8F14039-D26C-478B-A3B6-430B35B74BC5}" dt="2023-10-20T16:41:36.259" v="712" actId="1036"/>
-        <pc:sldMkLst>
-          <pc:docMk/>
-          <pc:sldMk cId="1253646022" sldId="284"/>
-        </pc:sldMkLst>
       </pc:sldChg>
     </pc:docChg>
   </pc:docChgLst>
@@ -679,7 +364,7 @@
           <a:p>
             <a:fld id="{A7DB5662-7327-465C-9A70-AD96B7A8D67A}" type="datetimeFigureOut">
               <a:rPr lang="en-US" smtClean="0"/>
-              <a:t>10/21/2025</a:t>
+              <a:t>10/19/2026</a:t>
             </a:fld>
             <a:endParaRPr lang="en-US"/>
           </a:p>
@@ -877,7 +562,7 @@
           <a:p>
             <a:fld id="{A7DB5662-7327-465C-9A70-AD96B7A8D67A}" type="datetimeFigureOut">
               <a:rPr lang="en-US" smtClean="0"/>
-              <a:t>10/21/2025</a:t>
+              <a:t>10/19/2026</a:t>
             </a:fld>
             <a:endParaRPr lang="en-US"/>
           </a:p>
@@ -1085,7 +770,7 @@
           <a:p>
             <a:fld id="{A7DB5662-7327-465C-9A70-AD96B7A8D67A}" type="datetimeFigureOut">
               <a:rPr lang="en-US" smtClean="0"/>
-              <a:t>10/21/2025</a:t>
+              <a:t>10/19/2026</a:t>
             </a:fld>
             <a:endParaRPr lang="en-US"/>
           </a:p>
@@ -1283,7 +968,7 @@
           <a:p>
             <a:fld id="{A7DB5662-7327-465C-9A70-AD96B7A8D67A}" type="datetimeFigureOut">
               <a:rPr lang="en-US" smtClean="0"/>
-              <a:t>10/21/2025</a:t>
+              <a:t>10/19/2026</a:t>
             </a:fld>
             <a:endParaRPr lang="en-US"/>
           </a:p>
@@ -1558,7 +1243,7 @@
           <a:p>
             <a:fld id="{A7DB5662-7327-465C-9A70-AD96B7A8D67A}" type="datetimeFigureOut">
               <a:rPr lang="en-US" smtClean="0"/>
-              <a:t>10/21/2025</a:t>
+              <a:t>10/19/2026</a:t>
             </a:fld>
             <a:endParaRPr lang="en-US"/>
           </a:p>
@@ -1823,7 +1508,7 @@
           <a:p>
             <a:fld id="{A7DB5662-7327-465C-9A70-AD96B7A8D67A}" type="datetimeFigureOut">
               <a:rPr lang="en-US" smtClean="0"/>
-              <a:t>10/21/2025</a:t>
+              <a:t>10/19/2026</a:t>
             </a:fld>
             <a:endParaRPr lang="en-US"/>
           </a:p>
@@ -2235,7 +1920,7 @@
           <a:p>
             <a:fld id="{A7DB5662-7327-465C-9A70-AD96B7A8D67A}" type="datetimeFigureOut">
               <a:rPr lang="en-US" smtClean="0"/>
-              <a:t>10/21/2025</a:t>
+              <a:t>10/19/2026</a:t>
             </a:fld>
             <a:endParaRPr lang="en-US"/>
           </a:p>
@@ -2376,7 +2061,7 @@
           <a:p>
             <a:fld id="{A7DB5662-7327-465C-9A70-AD96B7A8D67A}" type="datetimeFigureOut">
               <a:rPr lang="en-US" smtClean="0"/>
-              <a:t>10/21/2025</a:t>
+              <a:t>10/19/2026</a:t>
             </a:fld>
             <a:endParaRPr lang="en-US"/>
           </a:p>
@@ -2489,7 +2174,7 @@
           <a:p>
             <a:fld id="{A7DB5662-7327-465C-9A70-AD96B7A8D67A}" type="datetimeFigureOut">
               <a:rPr lang="en-US" smtClean="0"/>
-              <a:t>10/21/2025</a:t>
+              <a:t>10/19/2026</a:t>
             </a:fld>
             <a:endParaRPr lang="en-US"/>
           </a:p>
@@ -2800,7 +2485,7 @@
           <a:p>
             <a:fld id="{A7DB5662-7327-465C-9A70-AD96B7A8D67A}" type="datetimeFigureOut">
               <a:rPr lang="en-US" smtClean="0"/>
-              <a:t>10/21/2025</a:t>
+              <a:t>10/19/2026</a:t>
             </a:fld>
             <a:endParaRPr lang="en-US"/>
           </a:p>
@@ -3088,7 +2773,7 @@
           <a:p>
             <a:fld id="{A7DB5662-7327-465C-9A70-AD96B7A8D67A}" type="datetimeFigureOut">
               <a:rPr lang="en-US" smtClean="0"/>
-              <a:t>10/21/2025</a:t>
+              <a:t>10/19/2026</a:t>
             </a:fld>
             <a:endParaRPr lang="en-US"/>
           </a:p>
@@ -3329,7 +3014,7 @@
           <a:p>
             <a:fld id="{A7DB5662-7327-465C-9A70-AD96B7A8D67A}" type="datetimeFigureOut">
               <a:rPr lang="en-US" smtClean="0"/>
-              <a:t>10/21/2025</a:t>
+              <a:t>10/19/2026</a:t>
             </a:fld>
             <a:endParaRPr lang="en-US"/>
           </a:p>
@@ -22278,7 +21963,7 @@
         <p:spPr/>
         <p:txBody>
           <a:bodyPr>
-            <a:normAutofit fontScale="92500" lnSpcReduction="20000"/>
+            <a:normAutofit fontScale="85000" lnSpcReduction="10000"/>
           </a:bodyPr>
           <a:lstStyle/>
           <a:p>
@@ -22344,19 +22029,7 @@
               <a:rPr lang="en-US" sz="2400" dirty="0">
                 <a:latin typeface="+mj-lt"/>
               </a:rPr>
-              <a:t>On the other </a:t>
-            </a:r>
-            <a:r>
-              <a:rPr lang="en-US" sz="2400" dirty="0" err="1">
-                <a:latin typeface="+mj-lt"/>
-              </a:rPr>
-              <a:t>han</a:t>
-            </a:r>
-            <a:r>
-              <a:rPr lang="en-US" sz="2400" dirty="0">
-                <a:latin typeface="+mj-lt"/>
-              </a:rPr>
-              <a:t>, it is also essential to jointly consider the degree to which a system's output matches the true value or desired outcome </a:t>
+              <a:t>On the other hand, it is also essential to jointly consider the degree to which a system's output matches the true value or desired outcome </a:t>
             </a:r>
             <a:r>
               <a:rPr lang="en-US" sz="2400" dirty="0" err="1">
@@ -22437,7 +22110,22 @@
               <a:rPr lang="en-US" sz="2400" dirty="0">
                 <a:latin typeface="+mj-lt"/>
               </a:rPr>
-              <a:t>. In many systems, increasing accuracy can limit flexibility, while enhancing flexibility may reduce overall accuracy.</a:t>
+              <a:t>. </a:t>
+            </a:r>
+          </a:p>
+          <a:p>
+            <a:pPr>
+              <a:lnSpc>
+                <a:spcPct val="150000"/>
+              </a:lnSpc>
+              <a:buFont typeface="Wingdings" panose="05000000000000000000" pitchFamily="2" charset="2"/>
+              <a:buChar char="§"/>
+            </a:pPr>
+            <a:r>
+              <a:rPr lang="en-US" sz="2400" dirty="0">
+                <a:latin typeface="+mj-lt"/>
+              </a:rPr>
+              <a:t>In many systems, increasing accuracy can limit flexibility, while enhancing flexibility may reduce overall accuracy.</a:t>
             </a:r>
           </a:p>
         </p:txBody>
@@ -23901,7 +23589,7 @@
               <a:rPr lang="en-US" b="1" dirty="0">
                 <a:latin typeface="+mj-lt"/>
               </a:rPr>
-              <a:t>There is a trade-off between hitting the nail on the head and generalize results</a:t>
+              <a:t>There is a trade-off between hitting the nail and generalize results</a:t>
             </a:r>
           </a:p>
         </p:txBody>
@@ -24583,19 +24271,7 @@
               <a:rPr lang="en-US" sz="2400" dirty="0">
                 <a:latin typeface="+mj-lt"/>
               </a:rPr>
-              <a:t>Then, why using a more restrictive model? Because of </a:t>
-            </a:r>
-            <a:r>
-              <a:rPr lang="en-US" sz="2400" b="1" dirty="0">
-                <a:latin typeface="+mj-lt"/>
-              </a:rPr>
-              <a:t>Inference</a:t>
-            </a:r>
-            <a:r>
-              <a:rPr lang="en-US" sz="2400" dirty="0">
-                <a:latin typeface="+mj-lt"/>
-              </a:rPr>
-              <a:t>: restrictive, simpler, models are more </a:t>
+              <a:t>Then, why using a more restrictive model? Restrictive, simpler, models are more </a:t>
             </a:r>
             <a:r>
               <a:rPr lang="en-US" sz="2400" b="1" dirty="0">
@@ -24634,13 +24310,13 @@
               <a:rPr lang="en-US" sz="2400" dirty="0">
                 <a:latin typeface="+mj-lt"/>
               </a:rPr>
-              <a:t>... that’s not always the case (to be preferred) because more flexible models suffer from high variance. This leads to the idea of the </a:t>
+              <a:t>... that’s not always the case because more flexible models suffer from high variance. This leads to the idea of the </a:t>
             </a:r>
             <a:r>
               <a:rPr lang="en-US" sz="2400" b="1" dirty="0">
                 <a:latin typeface="+mj-lt"/>
               </a:rPr>
-              <a:t>bias-variance trade-off, </a:t>
+              <a:t>bias-variance trade-off </a:t>
             </a:r>
             <a:endParaRPr lang="en-US" sz="2400" dirty="0">
               <a:latin typeface="+mj-lt"/>
@@ -25604,8 +25280,17 @@
               <a:rPr lang="en-US" sz="2400" dirty="0">
                 <a:latin typeface="+mj-lt"/>
               </a:rPr>
-              <a:t> refers to the error made approximating a real-life problem. For instance, a linear regression used to approximate any real-life relationship will incur in a large bias (little phenomena relate so simply!).</a:t>
-            </a:r>
+              <a:t> refers to the error made approximating a real-life problem. For instance, a linear regression used to approximate any real-life relationship will incur in a large bias (little phenomena relate </a:t>
+            </a:r>
+            <a:r>
+              <a:rPr lang="en-US" sz="2400">
+                <a:latin typeface="+mj-lt"/>
+              </a:rPr>
+              <a:t>so simply).</a:t>
+            </a:r>
+            <a:endParaRPr lang="en-US" sz="2400" dirty="0">
+              <a:latin typeface="+mj-lt"/>
+            </a:endParaRPr>
           </a:p>
           <a:p>
             <a:pPr>
